--- a/research/pitch/wayside-kxic-pitch.pptx
+++ b/research/pitch/wayside-kxic-pitch.pptx
@@ -7147,7 +7147,7 @@
                 <a:ea typeface="Arial" pitchFamily="34" charset="-122"/>
                 <a:cs typeface="Arial" pitchFamily="34" charset="-120"/>
               </a:rPr>
-              <a:t>GoodSAM showed that offering a case to several nearby responders at once, first-to-accept, gets a yes inside a minute. India Post's DIGIPIN now gives every stretch of pavement its own short address.</a:t>
+              <a:t>GoodSAM-style dispatch offers a case to several nearby responders at once, first-to-accept — and gets someone moving in under two minutes. India Post's DIGIPIN now gives every stretch of pavement its own short address.</a:t>
             </a:r>
             <a:endParaRPr lang="en-US" sz="1150" dirty="0"/>
           </a:p>

--- a/research/pitch/wayside-kxic-pitch.pptx
+++ b/research/pitch/wayside-kxic-pitch.pptx
@@ -7147,7 +7147,7 @@
                 <a:ea typeface="Arial" pitchFamily="34" charset="-122"/>
                 <a:cs typeface="Arial" pitchFamily="34" charset="-120"/>
               </a:rPr>
-              <a:t>GoodSAM-style dispatch offers a case to several nearby responders at once, first-to-accept — and gets someone moving in under two minutes. India Post's DIGIPIN now gives every stretch of pavement its own short address.</a:t>
+              <a:t>GoodSAM showed that offering a case to several nearby responders at once, first-to-accept, gets a yes inside a minute. India Post's DIGIPIN now gives every stretch of pavement its own short address.</a:t>
             </a:r>
             <a:endParaRPr lang="en-US" sz="1150" dirty="0"/>
           </a:p>

--- a/research/pitch/wayside-kxic-pitch.pptx
+++ b/research/pitch/wayside-kxic-pitch.pptx
@@ -10516,7 +10516,7 @@
                 <a:ea typeface="Arial" pitchFamily="34" charset="-122"/>
                 <a:cs typeface="Arial" pitchFamily="34" charset="-120"/>
               </a:rPr>
-              <a:t>One Delhi NGO, one pilot zone — Nizamuddin. Reached through the Equitech network and an existing Goonj relationship. The pitch is a working demo, not a proposal.</a:t>
+              <a:t>One Delhi NGO, one pilot zone — Nizamuddin. Reached through the Equitech network; NGO partner conversations start with this working demo. The pitch is a working demo, not a proposal.</a:t>
             </a:r>
             <a:endParaRPr lang="en-US" sz="1200" dirty="0"/>
           </a:p>

--- a/research/pitch/wayside-kxic-pitch.pptx
+++ b/research/pitch/wayside-kxic-pitch.pptx
@@ -2368,7 +2368,7 @@
                 <a:ea typeface="Arial" pitchFamily="34" charset="-122"/>
                 <a:cs typeface="Arial" pitchFamily="34" charset="-120"/>
               </a:rPr>
-              <a:t>Working demo · 111 tests</a:t>
+              <a:t>Working demo · 211 tests</a:t>
             </a:r>
             <a:endParaRPr lang="en-US" sz="1200" dirty="0"/>
           </a:p>
@@ -7437,7 +7437,7 @@
                 <a:ea typeface="Arial" pitchFamily="34" charset="-122"/>
                 <a:cs typeface="Arial" pitchFamily="34" charset="-120"/>
               </a:rPr>
-              <a:t>Equitech alum. Built the whole system solo — intake pipeline, control room, responder app, 111 automated tests — before asking anyone for a rupee. Every design choice in it cites a real system that came before and failed, for a specific, documented reason.</a:t>
+              <a:t>Equitech alum. Built the whole system solo — intake pipeline, control room, responder app, 211 automated tests — before asking anyone for a rupee. Every design choice in it cites a real system that came before and failed, for a specific, documented reason.</a:t>
             </a:r>
             <a:endParaRPr lang="en-US" sz="1250" dirty="0"/>
           </a:p>
@@ -8179,7 +8179,7 @@
                 <a:ea typeface="Courier New" pitchFamily="34" charset="-122"/>
                 <a:cs typeface="Courier New" pitchFamily="34" charset="-120"/>
               </a:rPr>
-              <a:t>the witness's phone — no app to install (shown under the project's original working name; a rename pass to Wayside is under way)</a:t>
+              <a:t>the witness's phone — no app to install</a:t>
             </a:r>
             <a:endParaRPr lang="en-US" sz="900" dirty="0"/>
           </a:p>
@@ -9070,7 +9070,7 @@
                 <a:ea typeface="Arial" pitchFamily="34" charset="-122"/>
                 <a:cs typeface="Arial" pitchFamily="34" charset="-120"/>
               </a:rPr>
-              <a:t>111 automated tests. Three real surfaces — control room, responder phone, witness phone — running the same loop end to end, offline, with zero paid API calls.</a:t>
+              <a:t>211 automated tests. Three real surfaces — control room, responder phone, witness phone — running the same loop end to end, offline, with zero paid API calls.</a:t>
             </a:r>
             <a:endParaRPr lang="en-US" sz="1400" dirty="0"/>
           </a:p>
@@ -9783,7 +9783,7 @@
         <p:spPr>
           <a:xfrm>
             <a:off x="7178040" y="2788920"/>
-            <a:ext cx="4206240" cy="1463040"/>
+            <a:ext cx="4206240" cy="1737360"/>
           </a:xfrm>
           <a:prstGeom prst="rect">
             <a:avLst/>
@@ -9810,7 +9810,7 @@
                 <a:ea typeface="Arial" pitchFamily="34" charset="-122"/>
                 <a:cs typeface="Arial" pitchFamily="34" charset="-120"/>
               </a:rPr>
-              <a:t>Screens shown as captured during development, under the project's original working name — a rename pass to Wayside is under way across the running product.</a:t>
+              <a:t>Every case carries a signed trail — who reported it, what the agent inferred, which responder closed it. Witness reports and agent inferences are HMAC-tagged; a responder's observations are labelled as observations, never as fact.</a:t>
             </a:r>
             <a:endParaRPr lang="en-US" sz="1200" dirty="0"/>
           </a:p>

--- a/research/pitch/wayside-kxic-pitch.pptx
+++ b/research/pitch/wayside-kxic-pitch.pptx
@@ -2368,7 +2368,7 @@
                 <a:ea typeface="Arial" pitchFamily="34" charset="-122"/>
                 <a:cs typeface="Arial" pitchFamily="34" charset="-120"/>
               </a:rPr>
-              <a:t>Working demo · 211 tests</a:t>
+              <a:t>Working demo · 217 tests</a:t>
             </a:r>
             <a:endParaRPr lang="en-US" sz="1200" dirty="0"/>
           </a:p>
@@ -7437,7 +7437,7 @@
                 <a:ea typeface="Arial" pitchFamily="34" charset="-122"/>
                 <a:cs typeface="Arial" pitchFamily="34" charset="-120"/>
               </a:rPr>
-              <a:t>Equitech alum. Built the whole system solo — intake pipeline, control room, responder app, 211 automated tests — before asking anyone for a rupee. Every design choice in it cites a real system that came before and failed, for a specific, documented reason.</a:t>
+              <a:t>Equitech alum. Built the whole system solo — intake pipeline, control room, responder app, 217 automated tests — before asking anyone for a rupee. Every design choice in it cites a real system that came before and failed, for a specific, documented reason.</a:t>
             </a:r>
             <a:endParaRPr lang="en-US" sz="1250" dirty="0"/>
           </a:p>
@@ -9070,7 +9070,7 @@
                 <a:ea typeface="Arial" pitchFamily="34" charset="-122"/>
                 <a:cs typeface="Arial" pitchFamily="34" charset="-120"/>
               </a:rPr>
-              <a:t>211 automated tests. Three real surfaces — control room, responder phone, witness phone — running the same loop end to end, offline, with zero paid API calls.</a:t>
+              <a:t>217 automated tests. Three real surfaces — control room, responder phone, witness phone — running the same loop end to end, offline, with zero paid API calls.</a:t>
             </a:r>
             <a:endParaRPr lang="en-US" sz="1400" dirty="0"/>
           </a:p>

--- a/research/pitch/wayside-kxic-pitch.pptx
+++ b/research/pitch/wayside-kxic-pitch.pptx
@@ -2368,7 +2368,7 @@
                 <a:ea typeface="Arial" pitchFamily="34" charset="-122"/>
                 <a:cs typeface="Arial" pitchFamily="34" charset="-120"/>
               </a:rPr>
-              <a:t>Working demo · 217 tests</a:t>
+              <a:t>Working demo · 224 tests</a:t>
             </a:r>
             <a:endParaRPr lang="en-US" sz="1200" dirty="0"/>
           </a:p>
@@ -7437,7 +7437,7 @@
                 <a:ea typeface="Arial" pitchFamily="34" charset="-122"/>
                 <a:cs typeface="Arial" pitchFamily="34" charset="-120"/>
               </a:rPr>
-              <a:t>Equitech alum. Built the whole system solo — intake pipeline, control room, responder app, 217 automated tests — before asking anyone for a rupee. Every design choice in it cites a real system that came before and failed, for a specific, documented reason.</a:t>
+              <a:t>Equitech alum. Built the whole system solo — intake pipeline, control room, responder app, 224 automated tests — before asking anyone for a rupee. Every design choice in it cites a real system that came before and failed, for a specific, documented reason.</a:t>
             </a:r>
             <a:endParaRPr lang="en-US" sz="1250" dirty="0"/>
           </a:p>
@@ -9070,7 +9070,7 @@
                 <a:ea typeface="Arial" pitchFamily="34" charset="-122"/>
                 <a:cs typeface="Arial" pitchFamily="34" charset="-120"/>
               </a:rPr>
-              <a:t>217 automated tests. Three real surfaces — control room, responder phone, witness phone — running the same loop end to end, offline, with zero paid API calls.</a:t>
+              <a:t>224 automated tests. Three real surfaces — control room, responder phone, witness phone — running the same loop end to end, offline, with zero paid API calls.</a:t>
             </a:r>
             <a:endParaRPr lang="en-US" sz="1400" dirty="0"/>
           </a:p>

--- a/research/pitch/wayside-kxic-pitch.pptx
+++ b/research/pitch/wayside-kxic-pitch.pptx
@@ -2368,7 +2368,7 @@
                 <a:ea typeface="Arial" pitchFamily="34" charset="-122"/>
                 <a:cs typeface="Arial" pitchFamily="34" charset="-120"/>
               </a:rPr>
-              <a:t>Working demo · 224 tests</a:t>
+              <a:t>Working demo · 245 tests</a:t>
             </a:r>
             <a:endParaRPr lang="en-US" sz="1200" dirty="0"/>
           </a:p>
@@ -7437,7 +7437,7 @@
                 <a:ea typeface="Arial" pitchFamily="34" charset="-122"/>
                 <a:cs typeface="Arial" pitchFamily="34" charset="-120"/>
               </a:rPr>
-              <a:t>Equitech alum. Built the whole system solo — intake pipeline, control room, responder app, 224 automated tests — before asking anyone for a rupee. Every design choice in it cites a real system that came before and failed, for a specific, documented reason.</a:t>
+              <a:t>Equitech alum. Built the whole system solo — intake pipeline, control room, responder app, 245 automated tests — before asking anyone for a rupee. Every design choice in it cites a real system that came before and failed, for a specific, documented reason.</a:t>
             </a:r>
             <a:endParaRPr lang="en-US" sz="1250" dirty="0"/>
           </a:p>
@@ -9070,7 +9070,7 @@
                 <a:ea typeface="Arial" pitchFamily="34" charset="-122"/>
                 <a:cs typeface="Arial" pitchFamily="34" charset="-120"/>
               </a:rPr>
-              <a:t>224 automated tests. Three real surfaces — control room, responder phone, witness phone — running the same loop end to end, offline, with zero paid API calls.</a:t>
+              <a:t>245 automated tests. Three real surfaces — control room, responder phone, witness phone — running the same loop end to end, offline, with zero paid API calls.</a:t>
             </a:r>
             <a:endParaRPr lang="en-US" sz="1400" dirty="0"/>
           </a:p>
